--- a/dist/초6/수학/연산과비례/초6_수학_연산과비례_07_비례식.pptx
+++ b/dist/초6/수학/연산과비례/초6_수학_연산과비례_07_비례식.pptx
@@ -121,13 +121,13 @@
   <p:extLst>
     <p:ext uri="{521415D9-36F7-43E2-AB2F-B90AF26B5E84}">
       <p14:sectionLst xmlns:p14="http://schemas.microsoft.com/office/powerpoint/2010/main">
-        <p14:section name="도입" id="{3729b16c-1ea7-2455-3e68-da741a737300}">
+        <p14:section name="도입" id="{e25d8fca-8f22-dc95-b5ee-529419d9abb6}">
           <p14:sldIdLst>
             <p14:sldId id="256"/>
             <p14:sldId id="257"/>
           </p14:sldIdLst>
         </p14:section>
-        <p14:section name="개념" id="{03656ebd-830d-3645-8ea3-716c7e3d4637}">
+        <p14:section name="개념" id="{72838511-ca15-7f2b-e7f5-2d4556853bf2}">
           <p14:sldIdLst>
             <p14:sldId id="258"/>
             <p14:sldId id="259"/>
@@ -135,7 +135,7 @@
             <p14:sldId id="262"/>
           </p14:sldIdLst>
         </p14:section>
-        <p14:section name="연습" id="{70c04469-9d09-33e7-1fe2-d3be4fdefbe1}">
+        <p14:section name="연습" id="{1fa3bd73-c8fd-f3e4-9cfe-ef74109694d5}">
           <p14:sldIdLst>
             <p14:sldId id="260"/>
             <p14:sldId id="263"/>
@@ -143,25 +143,25 @@
             <p14:sldId id="265"/>
           </p14:sldIdLst>
         </p14:section>
-        <p14:section name="개념" id="{41edbe9d-0bab-9db8-8c26-4dd3c81771cb}">
+        <p14:section name="개념" id="{2f5be080-835e-76fa-8eb8-0189ac6eb0fb}">
           <p14:sldIdLst/>
         </p14:section>
-        <p14:section name="연습" id="{5a40c245-17eb-6719-e5ac-2bec0aae4321}">
+        <p14:section name="연습" id="{4e679976-47b0-f77a-8376-050c9888e8f3}">
           <p14:sldIdLst/>
         </p14:section>
-        <p14:section name="확인" id="{b50863fe-4c4e-84de-43c1-5aad36621597}">
+        <p14:section name="확인" id="{9593f80e-6a5f-be08-94b9-e4b6a08f1dab}">
           <p14:sldIdLst>
             <p14:sldId id="266"/>
             <p14:sldId id="267"/>
             <p14:sldId id="268"/>
           </p14:sldIdLst>
         </p14:section>
-        <p14:section name="정리" id="{c09147db-6725-7e68-3704-3f55dd01b659}">
+        <p14:section name="정리" id="{3d0ee1c2-4deb-234c-98d1-772592d684f1}">
           <p14:sldIdLst>
             <p14:sldId id="269"/>
           </p14:sldIdLst>
         </p14:section>
-        <p14:section name="보충" id="{088db3e8-e3b2-4ca6-d543-876ff5bc5c91}">
+        <p14:section name="보충" id="{4fd8416b-5fad-dd77-03b6-a17fc2cbbb55}">
           <p14:sldIdLst>
             <p14:sldId id="270"/>
           </p14:sldIdLst>
@@ -3526,7 +3526,7 @@
                 <a:ea typeface="맑은 고딕" pitchFamily="34" charset="-122"/>
                 <a:cs typeface="맑은 고딕" pitchFamily="34" charset="-120"/>
               </a:rPr>
-              <a:t>원액이 60 mL이면 물은 몇 mL인가요?</a:t>
+              <a:t>원액이 60 mL이면 물은 몇 mL인가요?</a:t>
             </a:r>
             <a:endParaRPr lang="ko-KR" sz="2800" dirty="0"/>
           </a:p>
@@ -3612,7 +3612,7 @@
                 <a:ea typeface="맑은 고딕" pitchFamily="34" charset="-122"/>
                 <a:cs typeface="맑은 고딕" pitchFamily="34" charset="-120"/>
               </a:rPr>
-              <a:t>쿠키 4개에 버터가 30 g 들어요.</a:t>
+              <a:t>쿠키 4개에 버터가 30 g 들어요.</a:t>
             </a:r>
             <a:endParaRPr lang="ko-KR" sz="2800" dirty="0"/>
           </a:p>
@@ -5083,7 +5083,7 @@
                 <a:ea typeface="맑은 고딕" pitchFamily="34" charset="-122"/>
                 <a:cs typeface="맑은 고딕" pitchFamily="34" charset="-120"/>
               </a:rPr>
-              <a:t>가로가 45 cm이면 세로는 몇 cm인가요?</a:t>
+              <a:t>가로가 45 cm이면 세로는 몇 cm인가요?</a:t>
             </a:r>
             <a:endParaRPr lang="ko-KR" sz="2800" dirty="0"/>
           </a:p>
@@ -5169,7 +5169,7 @@
                 <a:ea typeface="맑은 고딕" pitchFamily="34" charset="-122"/>
                 <a:cs typeface="맑은 고딕" pitchFamily="34" charset="-120"/>
               </a:rPr>
-              <a:t>3분 동안 0.6 km를 걷는 빠르기로</a:t>
+              <a:t>3분 동안 0.6 km를 걷는 빠르기로</a:t>
             </a:r>
             <a:endParaRPr lang="ko-KR" sz="2800" dirty="0"/>
           </a:p>
